--- a/learn/assets/smart-tourism-concept-list-week1.pptx
+++ b/learn/assets/smart-tourism-concept-list-week1.pptx
@@ -1816,7 +1816,7 @@
                 <a:ea typeface="맑은 고딕" pitchFamily="34" charset="-122"/>
                 <a:cs typeface="맑은 고딕" pitchFamily="34" charset="-120"/>
               </a:rPr>
-              <a:t>신라대학교 미래융합학과</a:t>
+              <a:t>국립경국대학교 관광경영학과</a:t>
             </a:r>
             <a:endParaRPr lang="en-US" sz="1200" dirty="0"/>
           </a:p>
